--- a/Customer Churn Prediction Silde Deck.pptx
+++ b/Customer Churn Prediction Silde Deck.pptx
@@ -5,7 +5,7 @@
     <p:sldMasterId id="2147483690" r:id="rId1"/>
   </p:sldMasterIdLst>
   <p:notesMasterIdLst>
-    <p:notesMasterId r:id="rId24"/>
+    <p:notesMasterId r:id="rId22"/>
   </p:notesMasterIdLst>
   <p:sldIdLst>
     <p:sldId id="256" r:id="rId2"/>
@@ -26,10 +26,8 @@
     <p:sldId id="271" r:id="rId17"/>
     <p:sldId id="272" r:id="rId18"/>
     <p:sldId id="273" r:id="rId19"/>
-    <p:sldId id="274" r:id="rId20"/>
-    <p:sldId id="275" r:id="rId21"/>
-    <p:sldId id="276" r:id="rId22"/>
-    <p:sldId id="277" r:id="rId23"/>
+    <p:sldId id="276" r:id="rId20"/>
+    <p:sldId id="277" r:id="rId21"/>
   </p:sldIdLst>
   <p:sldSz cx="12192000" cy="6858000"/>
   <p:notesSz cx="6858000" cy="9144000"/>
@@ -148,8 +146,8 @@
 <pc:chgInfo xmlns:a="http://schemas.openxmlformats.org/drawingml/2006/main" xmlns:r="http://schemas.openxmlformats.org/officeDocument/2006/relationships" xmlns:ac="http://schemas.microsoft.com/office/drawing/2013/main/command" xmlns:pc="http://schemas.microsoft.com/office/powerpoint/2013/main/command">
   <pc:docChgLst>
     <pc:chgData name="Kedhar Swaminathan" userId="f467e1afcea2a17a" providerId="LiveId" clId="{BDBAC1A8-9B48-4264-BE0F-E0293DDEE6B3}"/>
-    <pc:docChg chg="undo custSel addSld modSld">
-      <pc:chgData name="Kedhar Swaminathan" userId="f467e1afcea2a17a" providerId="LiveId" clId="{BDBAC1A8-9B48-4264-BE0F-E0293DDEE6B3}" dt="2026-08-20T16:17:54.639" v="455" actId="20577"/>
+    <pc:docChg chg="undo custSel addSld delSld modSld">
+      <pc:chgData name="Kedhar Swaminathan" userId="f467e1afcea2a17a" providerId="LiveId" clId="{BDBAC1A8-9B48-4264-BE0F-E0293DDEE6B3}" dt="2026-08-20T16:21:41.783" v="457" actId="47"/>
       <pc:docMkLst>
         <pc:docMk/>
       </pc:docMkLst>
@@ -346,8 +344,8 @@
           </ac:spMkLst>
         </pc:spChg>
       </pc:sldChg>
-      <pc:sldChg chg="modSp new mod">
-        <pc:chgData name="Kedhar Swaminathan" userId="f467e1afcea2a17a" providerId="LiveId" clId="{BDBAC1A8-9B48-4264-BE0F-E0293DDEE6B3}" dt="2026-08-20T16:17:14.913" v="429" actId="20577"/>
+      <pc:sldChg chg="modSp new del mod">
+        <pc:chgData name="Kedhar Swaminathan" userId="f467e1afcea2a17a" providerId="LiveId" clId="{BDBAC1A8-9B48-4264-BE0F-E0293DDEE6B3}" dt="2026-08-20T16:21:36.551" v="456" actId="47"/>
         <pc:sldMkLst>
           <pc:docMk/>
           <pc:sldMk cId="4064247465" sldId="274"/>
@@ -369,8 +367,8 @@
           </ac:spMkLst>
         </pc:spChg>
       </pc:sldChg>
-      <pc:sldChg chg="modSp new mod">
-        <pc:chgData name="Kedhar Swaminathan" userId="f467e1afcea2a17a" providerId="LiveId" clId="{BDBAC1A8-9B48-4264-BE0F-E0293DDEE6B3}" dt="2026-08-20T16:15:58.960" v="421" actId="15"/>
+      <pc:sldChg chg="modSp new del mod">
+        <pc:chgData name="Kedhar Swaminathan" userId="f467e1afcea2a17a" providerId="LiveId" clId="{BDBAC1A8-9B48-4264-BE0F-E0293DDEE6B3}" dt="2026-08-20T16:21:41.783" v="457" actId="47"/>
         <pc:sldMkLst>
           <pc:docMk/>
           <pc:sldMk cId="704586407" sldId="275"/>
@@ -8151,7 +8149,7 @@
           <p:cNvPr id="2" name="Title 1">
             <a:extLst>
               <a:ext uri="{FF2B5EF4-FFF2-40B4-BE49-F238E27FC236}">
-                <a16:creationId xmlns:a16="http://schemas.microsoft.com/office/drawing/2014/main" id="{8E63FDA1-8CC4-205B-D3D6-FB056A5B0B81}"/>
+                <a16:creationId xmlns:a16="http://schemas.microsoft.com/office/drawing/2014/main" id="{27C20449-A340-E6DC-2843-584DF03E05AA}"/>
               </a:ext>
             </a:extLst>
           </p:cNvPr>
@@ -8169,7 +8167,7 @@
           <a:p>
             <a:r>
               <a:rPr lang="en-US" dirty="0"/>
-              <a:t>Measuring Business Success</a:t>
+              <a:t>What Did We Learn?</a:t>
             </a:r>
           </a:p>
         </p:txBody>
@@ -8179,7 +8177,7 @@
           <p:cNvPr id="3" name="Content Placeholder 2">
             <a:extLst>
               <a:ext uri="{FF2B5EF4-FFF2-40B4-BE49-F238E27FC236}">
-                <a16:creationId xmlns:a16="http://schemas.microsoft.com/office/drawing/2014/main" id="{93D9BA53-25B4-E1AB-73B3-11DC53013368}"/>
+                <a16:creationId xmlns:a16="http://schemas.microsoft.com/office/drawing/2014/main" id="{497C4091-589E-96B0-FE18-13338089FEE1}"/>
               </a:ext>
             </a:extLst>
           </p:cNvPr>
@@ -8197,19 +8195,19 @@
           <a:p>
             <a:r>
               <a:rPr lang="en-US" dirty="0"/>
-              <a:t>The model's technical performance is only the first level of success</a:t>
-            </a:r>
-          </a:p>
-          <a:p>
-            <a:r>
-              <a:rPr lang="en-US" dirty="0"/>
-              <a:t>Ultimately, the business needs to know whether using the model actually changes outcomes</a:t>
-            </a:r>
-          </a:p>
-          <a:p>
-            <a:r>
-              <a:rPr lang="en-US" dirty="0"/>
-              <a:t>The real test would be whether customers identified as high risk can be successfully retained through targeted intervention</a:t>
+              <a:t>To summarize, this project showed that customer churn represents a meaningful problem in the dataset, with approximately 26.5% of customers leaving</a:t>
+            </a:r>
+          </a:p>
+          <a:p>
+            <a:r>
+              <a:rPr lang="en-US" dirty="0"/>
+              <a:t>Exploratory analysis showed that tenure and several account, service, and billing characteristics are associated with churn</a:t>
+            </a:r>
+          </a:p>
+          <a:p>
+            <a:r>
+              <a:rPr lang="en-US" dirty="0"/>
+              <a:t>Most importantly, the model provides a potential way for a business to move from reacting to churn after it happens toward proactively identifying customers who may be at risk</a:t>
             </a:r>
           </a:p>
         </p:txBody>
@@ -8217,7 +8215,7 @@
     </p:spTree>
     <p:extLst>
       <p:ext uri="{BB962C8B-B14F-4D97-AF65-F5344CB8AC3E}">
-        <p14:creationId xmlns:p14="http://schemas.microsoft.com/office/powerpoint/2010/main" val="4064247465"/>
+        <p14:creationId xmlns:p14="http://schemas.microsoft.com/office/powerpoint/2010/main" val="4182081549"/>
       </p:ext>
     </p:extLst>
   </p:cSld>
@@ -8345,255 +8343,6 @@
 </file>
 
 <file path=ppt/slides/slide20.xml><?xml version="1.0" encoding="utf-8"?>
-<p:sld xmlns:a="http://schemas.openxmlformats.org/drawingml/2006/main" xmlns:r="http://schemas.openxmlformats.org/officeDocument/2006/relationships" xmlns:p="http://schemas.openxmlformats.org/presentationml/2006/main">
-  <p:cSld>
-    <p:spTree>
-      <p:nvGrpSpPr>
-        <p:cNvPr id="1" name=""/>
-        <p:cNvGrpSpPr/>
-        <p:nvPr/>
-      </p:nvGrpSpPr>
-      <p:grpSpPr>
-        <a:xfrm>
-          <a:off x="0" y="0"/>
-          <a:ext cx="0" cy="0"/>
-          <a:chOff x="0" y="0"/>
-          <a:chExt cx="0" cy="0"/>
-        </a:xfrm>
-      </p:grpSpPr>
-      <p:sp>
-        <p:nvSpPr>
-          <p:cNvPr id="2" name="Title 1">
-            <a:extLst>
-              <a:ext uri="{FF2B5EF4-FFF2-40B4-BE49-F238E27FC236}">
-                <a16:creationId xmlns:a16="http://schemas.microsoft.com/office/drawing/2014/main" id="{96CE3BA4-ECE9-F9C9-0A7B-A17C0BD720F4}"/>
-              </a:ext>
-            </a:extLst>
-          </p:cNvPr>
-          <p:cNvSpPr>
-            <a:spLocks noGrp="1"/>
-          </p:cNvSpPr>
-          <p:nvPr>
-            <p:ph type="title"/>
-          </p:nvPr>
-        </p:nvSpPr>
-        <p:spPr/>
-        <p:txBody>
-          <a:bodyPr/>
-          <a:lstStyle/>
-          <a:p>
-            <a:r>
-              <a:rPr lang="en-US" dirty="0"/>
-              <a:t>Limitations &amp; Future Work</a:t>
-            </a:r>
-          </a:p>
-        </p:txBody>
-      </p:sp>
-      <p:sp>
-        <p:nvSpPr>
-          <p:cNvPr id="3" name="Content Placeholder 2">
-            <a:extLst>
-              <a:ext uri="{FF2B5EF4-FFF2-40B4-BE49-F238E27FC236}">
-                <a16:creationId xmlns:a16="http://schemas.microsoft.com/office/drawing/2014/main" id="{1FB023AA-BB28-2540-4664-CCDDAE151A98}"/>
-              </a:ext>
-            </a:extLst>
-          </p:cNvPr>
-          <p:cNvSpPr>
-            <a:spLocks noGrp="1"/>
-          </p:cNvSpPr>
-          <p:nvPr>
-            <p:ph idx="1"/>
-          </p:nvPr>
-        </p:nvSpPr>
-        <p:spPr/>
-        <p:txBody>
-          <a:bodyPr/>
-          <a:lstStyle/>
-          <a:p>
-            <a:r>
-              <a:rPr lang="en-US" dirty="0"/>
-              <a:t>Limitations</a:t>
-            </a:r>
-          </a:p>
-          <a:p>
-            <a:pPr lvl="1"/>
-            <a:r>
-              <a:rPr lang="en-US" dirty="0"/>
-              <a:t>Historical customer data </a:t>
-            </a:r>
-          </a:p>
-          <a:p>
-            <a:pPr lvl="1"/>
-            <a:r>
-              <a:rPr lang="en-US" dirty="0"/>
-              <a:t>Model errors </a:t>
-            </a:r>
-          </a:p>
-          <a:p>
-            <a:pPr lvl="1"/>
-            <a:r>
-              <a:rPr lang="en-US" dirty="0"/>
-              <a:t>No causal conclusions </a:t>
-            </a:r>
-          </a:p>
-          <a:p>
-            <a:pPr lvl="1"/>
-            <a:r>
-              <a:rPr lang="en-US" dirty="0"/>
-              <a:t>Limited business context</a:t>
-            </a:r>
-          </a:p>
-          <a:p>
-            <a:r>
-              <a:rPr lang="en-US" dirty="0"/>
-              <a:t>Future work</a:t>
-            </a:r>
-          </a:p>
-          <a:p>
-            <a:pPr lvl="1"/>
-            <a:r>
-              <a:rPr lang="en-US" dirty="0"/>
-              <a:t>Systematic hyperparameter tuning </a:t>
-            </a:r>
-          </a:p>
-          <a:p>
-            <a:pPr lvl="1"/>
-            <a:r>
-              <a:rPr lang="en-US" dirty="0"/>
-              <a:t>Cross-validation </a:t>
-            </a:r>
-          </a:p>
-          <a:p>
-            <a:pPr lvl="1"/>
-            <a:r>
-              <a:rPr lang="en-US" dirty="0"/>
-              <a:t>Additional behavioral data </a:t>
-            </a:r>
-          </a:p>
-          <a:p>
-            <a:pPr lvl="1"/>
-            <a:r>
-              <a:rPr lang="en-US" dirty="0"/>
-              <a:t>Customer-service interaction data</a:t>
-            </a:r>
-          </a:p>
-          <a:p>
-            <a:endParaRPr lang="en-US" dirty="0"/>
-          </a:p>
-        </p:txBody>
-      </p:sp>
-    </p:spTree>
-    <p:extLst>
-      <p:ext uri="{BB962C8B-B14F-4D97-AF65-F5344CB8AC3E}">
-        <p14:creationId xmlns:p14="http://schemas.microsoft.com/office/powerpoint/2010/main" val="704586407"/>
-      </p:ext>
-    </p:extLst>
-  </p:cSld>
-  <p:clrMapOvr>
-    <a:masterClrMapping/>
-  </p:clrMapOvr>
-</p:sld>
-</file>
-
-<file path=ppt/slides/slide21.xml><?xml version="1.0" encoding="utf-8"?>
-<p:sld xmlns:a="http://schemas.openxmlformats.org/drawingml/2006/main" xmlns:r="http://schemas.openxmlformats.org/officeDocument/2006/relationships" xmlns:p="http://schemas.openxmlformats.org/presentationml/2006/main">
-  <p:cSld>
-    <p:spTree>
-      <p:nvGrpSpPr>
-        <p:cNvPr id="1" name=""/>
-        <p:cNvGrpSpPr/>
-        <p:nvPr/>
-      </p:nvGrpSpPr>
-      <p:grpSpPr>
-        <a:xfrm>
-          <a:off x="0" y="0"/>
-          <a:ext cx="0" cy="0"/>
-          <a:chOff x="0" y="0"/>
-          <a:chExt cx="0" cy="0"/>
-        </a:xfrm>
-      </p:grpSpPr>
-      <p:sp>
-        <p:nvSpPr>
-          <p:cNvPr id="2" name="Title 1">
-            <a:extLst>
-              <a:ext uri="{FF2B5EF4-FFF2-40B4-BE49-F238E27FC236}">
-                <a16:creationId xmlns:a16="http://schemas.microsoft.com/office/drawing/2014/main" id="{27C20449-A340-E6DC-2843-584DF03E05AA}"/>
-              </a:ext>
-            </a:extLst>
-          </p:cNvPr>
-          <p:cNvSpPr>
-            <a:spLocks noGrp="1"/>
-          </p:cNvSpPr>
-          <p:nvPr>
-            <p:ph type="title"/>
-          </p:nvPr>
-        </p:nvSpPr>
-        <p:spPr/>
-        <p:txBody>
-          <a:bodyPr/>
-          <a:lstStyle/>
-          <a:p>
-            <a:r>
-              <a:rPr lang="en-US" dirty="0"/>
-              <a:t>What Did We Learn?</a:t>
-            </a:r>
-          </a:p>
-        </p:txBody>
-      </p:sp>
-      <p:sp>
-        <p:nvSpPr>
-          <p:cNvPr id="3" name="Content Placeholder 2">
-            <a:extLst>
-              <a:ext uri="{FF2B5EF4-FFF2-40B4-BE49-F238E27FC236}">
-                <a16:creationId xmlns:a16="http://schemas.microsoft.com/office/drawing/2014/main" id="{497C4091-589E-96B0-FE18-13338089FEE1}"/>
-              </a:ext>
-            </a:extLst>
-          </p:cNvPr>
-          <p:cNvSpPr>
-            <a:spLocks noGrp="1"/>
-          </p:cNvSpPr>
-          <p:nvPr>
-            <p:ph idx="1"/>
-          </p:nvPr>
-        </p:nvSpPr>
-        <p:spPr/>
-        <p:txBody>
-          <a:bodyPr/>
-          <a:lstStyle/>
-          <a:p>
-            <a:r>
-              <a:rPr lang="en-US" dirty="0"/>
-              <a:t>To summarize, this project showed that customer churn represents a meaningful problem in the dataset, with approximately 26.5% of customers leaving</a:t>
-            </a:r>
-          </a:p>
-          <a:p>
-            <a:r>
-              <a:rPr lang="en-US" dirty="0"/>
-              <a:t>Exploratory analysis showed that tenure and several account, service, and billing characteristics are associated with churn</a:t>
-            </a:r>
-          </a:p>
-          <a:p>
-            <a:r>
-              <a:rPr lang="en-US" dirty="0"/>
-              <a:t>Most importantly, the model provides a potential way for a business to move from reacting to churn after it happens toward proactively identifying customers who may be at risk</a:t>
-            </a:r>
-          </a:p>
-        </p:txBody>
-      </p:sp>
-    </p:spTree>
-    <p:extLst>
-      <p:ext uri="{BB962C8B-B14F-4D97-AF65-F5344CB8AC3E}">
-        <p14:creationId xmlns:p14="http://schemas.microsoft.com/office/powerpoint/2010/main" val="4182081549"/>
-      </p:ext>
-    </p:extLst>
-  </p:cSld>
-  <p:clrMapOvr>
-    <a:masterClrMapping/>
-  </p:clrMapOvr>
-</p:sld>
-</file>
-
-<file path=ppt/slides/slide22.xml><?xml version="1.0" encoding="utf-8"?>
 <p:sld xmlns:a="http://schemas.openxmlformats.org/drawingml/2006/main" xmlns:r="http://schemas.openxmlformats.org/officeDocument/2006/relationships" xmlns:p="http://schemas.openxmlformats.org/presentationml/2006/main">
   <p:cSld>
     <p:spTree>
